--- a/public/fun/cards/public/public-08.pptx
+++ b/public/fun/cards/public/public-08.pptx
@@ -3085,7 +3085,7 @@
     <p:bg>
       <p:bgPr>
         <a:solidFill>
-          <a:srgbClr val="431920"/>
+          <a:srgbClr val="3D5AFE"/>
         </a:solidFill>
         <a:effectLst/>
       </p:bgPr>
@@ -3105,14 +3105,14 @@
         </p:nvSpPr>
         <p:spPr>
           <a:xfrm>
-            <a:off x="1944000" y="216000"/>
-            <a:ext cx="10800" cy="1368000"/>
+            <a:off x="252000" y="144000"/>
+            <a:ext cx="201600" cy="21600"/>
           </a:xfrm>
           <a:prstGeom prst="rect">
             <a:avLst/>
           </a:prstGeom>
           <a:solidFill>
-            <a:srgbClr val="AD6D78"/>
+            <a:srgbClr val="FFFFFF"/>
           </a:solidFill>
           <a:ln>
             <a:noFill/>
@@ -3134,8 +3134,8 @@
         </p:nvSpPr>
         <p:spPr>
           <a:xfrm>
-            <a:off x="216000" y="201600"/>
-            <a:ext cx="1584000" cy="100800"/>
+            <a:off x="252000" y="273600"/>
+            <a:ext cx="2160000" cy="360000"/>
           </a:xfrm>
           <a:prstGeom prst="rect">
             <a:avLst/>
@@ -3150,159 +3150,11 @@
           <a:p>
             <a:pPr algn="l">
               <a:lnSpc>
-                <a:spcPts val="1015"/>
+                <a:spcPts val="3190"/>
               </a:lnSpc>
             </a:pPr>
             <a:r>
-              <a:rPr sz="700" b="1" spc="300">
-                <a:solidFill>
-                  <a:srgbClr val="BDAEB1"/>
-                </a:solidFill>
-                <a:latin typeface="맑은 고딕"/>
-                <a:ea typeface="맑은 고딕"/>
-              </a:rPr>
-              <a:t>기관명 · 부서명</a:t>
-            </a:r>
-          </a:p>
-        </p:txBody>
-      </p:sp>
-      <p:sp>
-        <p:nvSpPr>
-          <p:cNvPr id="4" name="Freeform 3"/>
-          <p:cNvSpPr/>
-          <p:nvPr/>
-        </p:nvSpPr>
-        <p:spPr>
-          <a:xfrm>
-            <a:off x="292053" y="430704"/>
-            <a:ext cx="207894" cy="197718"/>
-          </a:xfrm>
-          <a:custGeom>
-            <a:avLst/>
-            <a:gdLst/>
-            <a:ahLst/>
-            <a:cxnLst/>
-            <a:rect l="l" t="t" r="r" b="b"/>
-            <a:pathLst>
-              <a:path w="207894" h="197718">
-                <a:moveTo>
-                  <a:pt x="103947" y="0"/>
-                </a:moveTo>
-                <a:lnTo>
-                  <a:pt x="130482" y="72774"/>
-                </a:lnTo>
-                <a:lnTo>
-                  <a:pt x="207894" y="75522"/>
-                </a:lnTo>
-                <a:lnTo>
-                  <a:pt x="146881" y="123246"/>
-                </a:lnTo>
-                <a:lnTo>
-                  <a:pt x="168190" y="197718"/>
-                </a:lnTo>
-                <a:lnTo>
-                  <a:pt x="103947" y="154440"/>
-                </a:lnTo>
-                <a:lnTo>
-                  <a:pt x="39704" y="197718"/>
-                </a:lnTo>
-                <a:lnTo>
-                  <a:pt x="61013" y="123246"/>
-                </a:lnTo>
-                <a:lnTo>
-                  <a:pt x="0" y="75522"/>
-                </a:lnTo>
-                <a:lnTo>
-                  <a:pt x="77412" y="72774"/>
-                </a:lnTo>
-                <a:close/>
-              </a:path>
-            </a:pathLst>
-          </a:custGeom>
-          <a:solidFill>
-            <a:srgbClr val="AD6D78"/>
-          </a:solidFill>
-          <a:ln>
-            <a:noFill/>
-          </a:ln>
-        </p:spPr>
-        <p:txBody>
-          <a:bodyPr rtlCol="0" anchor="ctr"/>
-          <a:lstStyle/>
-          <a:p>
-            <a:pPr algn="ctr"/>
-          </a:p>
-        </p:txBody>
-      </p:sp>
-      <p:sp>
-        <p:nvSpPr>
-          <p:cNvPr id="5" name="텍스트"/>
-          <p:cNvSpPr txBox="1"/>
-          <p:nvPr/>
-        </p:nvSpPr>
-        <p:spPr>
-          <a:xfrm>
-            <a:off x="216000" y="972000"/>
-            <a:ext cx="1728000" cy="122400"/>
-          </a:xfrm>
-          <a:prstGeom prst="rect">
-            <a:avLst/>
-          </a:prstGeom>
-          <a:noFill/>
-        </p:spPr>
-        <p:txBody>
-          <a:bodyPr wrap="square" lIns="0" rIns="0" tIns="0" bIns="0" anchor="t">
-            <a:spAutoFit/>
-          </a:bodyPr>
-          <a:lstStyle/>
-          <a:p>
-            <a:pPr algn="l">
-              <a:lnSpc>
-                <a:spcPts val="1232"/>
-              </a:lnSpc>
-            </a:pPr>
-            <a:r>
-              <a:rPr sz="850" b="1">
-                <a:solidFill>
-                  <a:srgbClr val="B9838C"/>
-                </a:solidFill>
-                <a:latin typeface="맑은 고딕"/>
-                <a:ea typeface="맑은 고딕"/>
-              </a:rPr>
-              <a:t>민원담당</a:t>
-            </a:r>
-          </a:p>
-        </p:txBody>
-      </p:sp>
-      <p:sp>
-        <p:nvSpPr>
-          <p:cNvPr id="6" name="텍스트"/>
-          <p:cNvSpPr txBox="1"/>
-          <p:nvPr/>
-        </p:nvSpPr>
-        <p:spPr>
-          <a:xfrm>
-            <a:off x="216000" y="1123200"/>
-            <a:ext cx="1728000" cy="346712"/>
-          </a:xfrm>
-          <a:prstGeom prst="rect">
-            <a:avLst/>
-          </a:prstGeom>
-          <a:noFill/>
-        </p:spPr>
-        <p:txBody>
-          <a:bodyPr wrap="square" lIns="0" rIns="0" tIns="0" bIns="0" anchor="t">
-            <a:spAutoFit/>
-          </a:bodyPr>
-          <a:lstStyle/>
-          <a:p>
-            <a:pPr algn="l">
-              <a:lnSpc>
-                <a:spcPts val="3045"/>
-              </a:lnSpc>
-            </a:pPr>
-            <a:r>
-              <a:rPr sz="2100" b="1" spc="50">
+              <a:rPr sz="2200" b="1">
                 <a:solidFill>
                   <a:srgbClr val="FFFFFF"/>
                 </a:solidFill>
@@ -3316,14 +3168,14 @@
       </p:sp>
       <p:sp>
         <p:nvSpPr>
-          <p:cNvPr id="7" name="텍스트"/>
+          <p:cNvPr id="4" name="텍스트"/>
           <p:cNvSpPr txBox="1"/>
           <p:nvPr/>
         </p:nvSpPr>
         <p:spPr>
           <a:xfrm>
-            <a:off x="2073600" y="540000"/>
-            <a:ext cx="122400" cy="168911"/>
+            <a:off x="252000" y="676800"/>
+            <a:ext cx="2160000" cy="171451"/>
           </a:xfrm>
           <a:prstGeom prst="rect">
             <a:avLst/>
@@ -3338,32 +3190,32 @@
           <a:p>
             <a:pPr algn="l">
               <a:lnSpc>
-                <a:spcPts val="1015"/>
+                <a:spcPts val="1305"/>
               </a:lnSpc>
             </a:pPr>
             <a:r>
-              <a:rPr sz="700" b="1">
+              <a:rPr sz="900" b="0">
                 <a:solidFill>
-                  <a:srgbClr val="B9838C"/>
+                  <a:srgbClr val="D4DBFF"/>
                 </a:solidFill>
                 <a:latin typeface="맑은 고딕"/>
                 <a:ea typeface="맑은 고딕"/>
               </a:rPr>
-              <a:t>T</a:t>
-            </a:r>
-          </a:p>
-        </p:txBody>
-      </p:sp>
-      <p:sp>
-        <p:nvSpPr>
-          <p:cNvPr id="8" name="텍스트"/>
+              <a:t>민원담당</a:t>
+            </a:r>
+          </a:p>
+        </p:txBody>
+      </p:sp>
+      <p:sp>
+        <p:nvSpPr>
+          <p:cNvPr id="5" name="텍스트"/>
           <p:cNvSpPr txBox="1"/>
           <p:nvPr/>
         </p:nvSpPr>
         <p:spPr>
           <a:xfrm>
-            <a:off x="2217600" y="540000"/>
-            <a:ext cx="900000" cy="168911"/>
+            <a:off x="1548000" y="230400"/>
+            <a:ext cx="1440000" cy="123826"/>
           </a:xfrm>
           <a:prstGeom prst="rect">
             <a:avLst/>
@@ -3376,13 +3228,114 @@
           </a:bodyPr>
           <a:lstStyle/>
           <a:p>
+            <a:pPr algn="r">
+              <a:lnSpc>
+                <a:spcPts val="942"/>
+              </a:lnSpc>
+            </a:pPr>
+            <a:r>
+              <a:rPr sz="650" b="1" spc="200">
+                <a:solidFill>
+                  <a:srgbClr val="D4DBFF"/>
+                </a:solidFill>
+                <a:latin typeface="맑은 고딕"/>
+                <a:ea typeface="맑은 고딕"/>
+              </a:rPr>
+              <a:t>기관명 · 부서명</a:t>
+            </a:r>
+          </a:p>
+        </p:txBody>
+      </p:sp>
+      <p:cxnSp>
+        <p:nvCxnSpPr>
+          <p:cNvPr id="6" name="Connector 5"/>
+          <p:cNvCxnSpPr/>
+          <p:nvPr/>
+        </p:nvCxnSpPr>
+        <p:spPr>
+          <a:xfrm>
+            <a:off x="252000" y="1051200"/>
+            <a:ext cx="2736000" cy="0"/>
+          </a:xfrm>
+          <a:prstGeom prst="line">
+            <a:avLst/>
+          </a:prstGeom>
+          <a:ln w="5760">
+            <a:solidFill>
+              <a:srgbClr val="8B9CFE"/>
+            </a:solidFill>
+          </a:ln>
+        </p:spPr>
+      </p:cxnSp>
+      <p:sp>
+        <p:nvSpPr>
+          <p:cNvPr id="7" name="텍스트"/>
+          <p:cNvSpPr txBox="1"/>
+          <p:nvPr/>
+        </p:nvSpPr>
+        <p:spPr>
+          <a:xfrm>
+            <a:off x="252000" y="1123200"/>
+            <a:ext cx="576000" cy="99061"/>
+          </a:xfrm>
+          <a:prstGeom prst="rect">
+            <a:avLst/>
+          </a:prstGeom>
+          <a:noFill/>
+        </p:spPr>
+        <p:txBody>
+          <a:bodyPr wrap="square" lIns="0" rIns="0" tIns="0" bIns="0" anchor="t">
+            <a:spAutoFit/>
+          </a:bodyPr>
+          <a:lstStyle/>
+          <a:p>
             <a:pPr algn="l">
               <a:lnSpc>
-                <a:spcPts val="1015"/>
+                <a:spcPts val="754"/>
               </a:lnSpc>
             </a:pPr>
             <a:r>
-              <a:rPr sz="700" b="0">
+              <a:rPr sz="520" b="1" spc="150">
+                <a:solidFill>
+                  <a:srgbClr val="D4DBFF"/>
+                </a:solidFill>
+                <a:latin typeface="맑은 고딕"/>
+                <a:ea typeface="맑은 고딕"/>
+              </a:rPr>
+              <a:t>TEL</a:t>
+            </a:r>
+          </a:p>
+        </p:txBody>
+      </p:sp>
+      <p:sp>
+        <p:nvSpPr>
+          <p:cNvPr id="8" name="텍스트"/>
+          <p:cNvSpPr txBox="1"/>
+          <p:nvPr/>
+        </p:nvSpPr>
+        <p:spPr>
+          <a:xfrm>
+            <a:off x="900000" y="1101600"/>
+            <a:ext cx="2088000" cy="142876"/>
+          </a:xfrm>
+          <a:prstGeom prst="rect">
+            <a:avLst/>
+          </a:prstGeom>
+          <a:noFill/>
+        </p:spPr>
+        <p:txBody>
+          <a:bodyPr wrap="square" lIns="0" rIns="0" tIns="0" bIns="0" anchor="t">
+            <a:spAutoFit/>
+          </a:bodyPr>
+          <a:lstStyle/>
+          <a:p>
+            <a:pPr algn="l">
+              <a:lnSpc>
+                <a:spcPts val="1087"/>
+              </a:lnSpc>
+            </a:pPr>
+            <a:r>
+              <a:rPr sz="750" b="0">
                 <a:solidFill>
                   <a:srgbClr val="FFFFFF"/>
                 </a:solidFill>
@@ -3394,16 +3347,37 @@
           </a:p>
         </p:txBody>
       </p:sp>
-      <p:sp>
-        <p:nvSpPr>
-          <p:cNvPr id="9" name="텍스트"/>
+      <p:cxnSp>
+        <p:nvCxnSpPr>
+          <p:cNvPr id="9" name="Connector 8"/>
+          <p:cNvCxnSpPr/>
+          <p:nvPr/>
+        </p:nvCxnSpPr>
+        <p:spPr>
+          <a:xfrm>
+            <a:off x="252000" y="1274400"/>
+            <a:ext cx="2736000" cy="0"/>
+          </a:xfrm>
+          <a:prstGeom prst="line">
+            <a:avLst/>
+          </a:prstGeom>
+          <a:ln w="5760">
+            <a:solidFill>
+              <a:srgbClr val="8B9CFE"/>
+            </a:solidFill>
+          </a:ln>
+        </p:spPr>
+      </p:cxnSp>
+      <p:sp>
+        <p:nvSpPr>
+          <p:cNvPr id="10" name="텍스트"/>
           <p:cNvSpPr txBox="1"/>
           <p:nvPr/>
         </p:nvSpPr>
         <p:spPr>
           <a:xfrm>
-            <a:off x="2073600" y="708911"/>
-            <a:ext cx="122400" cy="168911"/>
+            <a:off x="252000" y="1346400"/>
+            <a:ext cx="576000" cy="99061"/>
           </a:xfrm>
           <a:prstGeom prst="rect">
             <a:avLst/>
@@ -3418,32 +3392,32 @@
           <a:p>
             <a:pPr algn="l">
               <a:lnSpc>
-                <a:spcPts val="1015"/>
+                <a:spcPts val="754"/>
               </a:lnSpc>
             </a:pPr>
             <a:r>
-              <a:rPr sz="700" b="1">
+              <a:rPr sz="520" b="1" spc="150">
                 <a:solidFill>
-                  <a:srgbClr val="B9838C"/>
+                  <a:srgbClr val="D4DBFF"/>
                 </a:solidFill>
                 <a:latin typeface="맑은 고딕"/>
                 <a:ea typeface="맑은 고딕"/>
               </a:rPr>
-              <a:t>E</a:t>
-            </a:r>
-          </a:p>
-        </p:txBody>
-      </p:sp>
-      <p:sp>
-        <p:nvSpPr>
-          <p:cNvPr id="10" name="텍스트"/>
+              <a:t>MAIL</a:t>
+            </a:r>
+          </a:p>
+        </p:txBody>
+      </p:sp>
+      <p:sp>
+        <p:nvSpPr>
+          <p:cNvPr id="11" name="텍스트"/>
           <p:cNvSpPr txBox="1"/>
           <p:nvPr/>
         </p:nvSpPr>
         <p:spPr>
           <a:xfrm>
-            <a:off x="2217600" y="708911"/>
-            <a:ext cx="900000" cy="168911"/>
+            <a:off x="900000" y="1324800"/>
+            <a:ext cx="2088000" cy="142876"/>
           </a:xfrm>
           <a:prstGeom prst="rect">
             <a:avLst/>
@@ -3458,11 +3432,11 @@
           <a:p>
             <a:pPr algn="l">
               <a:lnSpc>
-                <a:spcPts val="1015"/>
+                <a:spcPts val="1087"/>
               </a:lnSpc>
             </a:pPr>
             <a:r>
-              <a:rPr sz="700" b="0">
+              <a:rPr sz="750" b="0">
                 <a:solidFill>
                   <a:srgbClr val="FFFFFF"/>
                 </a:solidFill>
@@ -3474,16 +3448,37 @@
           </a:p>
         </p:txBody>
       </p:sp>
-      <p:sp>
-        <p:nvSpPr>
-          <p:cNvPr id="11" name="텍스트"/>
+      <p:cxnSp>
+        <p:nvCxnSpPr>
+          <p:cNvPr id="12" name="Connector 11"/>
+          <p:cNvCxnSpPr/>
+          <p:nvPr/>
+        </p:nvCxnSpPr>
+        <p:spPr>
+          <a:xfrm>
+            <a:off x="252000" y="1497600"/>
+            <a:ext cx="2736000" cy="0"/>
+          </a:xfrm>
+          <a:prstGeom prst="line">
+            <a:avLst/>
+          </a:prstGeom>
+          <a:ln w="5760">
+            <a:solidFill>
+              <a:srgbClr val="8B9CFE"/>
+            </a:solidFill>
+          </a:ln>
+        </p:spPr>
+      </p:cxnSp>
+      <p:sp>
+        <p:nvSpPr>
+          <p:cNvPr id="13" name="텍스트"/>
           <p:cNvSpPr txBox="1"/>
           <p:nvPr/>
         </p:nvSpPr>
         <p:spPr>
           <a:xfrm>
-            <a:off x="2073600" y="877822"/>
-            <a:ext cx="122400" cy="168911"/>
+            <a:off x="252000" y="1569600"/>
+            <a:ext cx="576000" cy="99061"/>
           </a:xfrm>
           <a:prstGeom prst="rect">
             <a:avLst/>
@@ -3498,32 +3493,32 @@
           <a:p>
             <a:pPr algn="l">
               <a:lnSpc>
-                <a:spcPts val="1015"/>
+                <a:spcPts val="754"/>
               </a:lnSpc>
             </a:pPr>
             <a:r>
-              <a:rPr sz="700" b="1">
+              <a:rPr sz="520" b="1" spc="150">
                 <a:solidFill>
-                  <a:srgbClr val="B9838C"/>
+                  <a:srgbClr val="D4DBFF"/>
                 </a:solidFill>
                 <a:latin typeface="맑은 고딕"/>
                 <a:ea typeface="맑은 고딕"/>
               </a:rPr>
-              <a:t>A</a:t>
-            </a:r>
-          </a:p>
-        </p:txBody>
-      </p:sp>
-      <p:sp>
-        <p:nvSpPr>
-          <p:cNvPr id="12" name="텍스트"/>
+              <a:t>ADDR</a:t>
+            </a:r>
+          </a:p>
+        </p:txBody>
+      </p:sp>
+      <p:sp>
+        <p:nvSpPr>
+          <p:cNvPr id="14" name="텍스트"/>
           <p:cNvSpPr txBox="1"/>
           <p:nvPr/>
         </p:nvSpPr>
         <p:spPr>
           <a:xfrm>
-            <a:off x="2217600" y="877822"/>
-            <a:ext cx="900000" cy="168911"/>
+            <a:off x="900000" y="1548000"/>
+            <a:ext cx="2088000" cy="142876"/>
           </a:xfrm>
           <a:prstGeom prst="rect">
             <a:avLst/>
@@ -3538,11 +3533,11 @@
           <a:p>
             <a:pPr algn="l">
               <a:lnSpc>
-                <a:spcPts val="1015"/>
+                <a:spcPts val="1087"/>
               </a:lnSpc>
             </a:pPr>
             <a:r>
-              <a:rPr sz="700" b="0">
+              <a:rPr sz="750" b="0">
                 <a:solidFill>
                   <a:srgbClr val="FFFFFF"/>
                 </a:solidFill>
@@ -3554,6 +3549,27 @@
           </a:p>
         </p:txBody>
       </p:sp>
+      <p:cxnSp>
+        <p:nvCxnSpPr>
+          <p:cNvPr id="15" name="Connector 14"/>
+          <p:cNvCxnSpPr/>
+          <p:nvPr/>
+        </p:nvCxnSpPr>
+        <p:spPr>
+          <a:xfrm>
+            <a:off x="252000" y="1720800"/>
+            <a:ext cx="2736000" cy="0"/>
+          </a:xfrm>
+          <a:prstGeom prst="line">
+            <a:avLst/>
+          </a:prstGeom>
+          <a:ln w="5760">
+            <a:solidFill>
+              <a:srgbClr val="8B9CFE"/>
+            </a:solidFill>
+          </a:ln>
+        </p:spPr>
+      </p:cxnSp>
     </p:spTree>
   </p:cSld>
   <p:clrMapOvr>
@@ -3568,7 +3584,7 @@
     <p:bg>
       <p:bgPr>
         <a:solidFill>
-          <a:srgbClr val="FBF8F2"/>
+          <a:srgbClr val="FFFFFF"/>
         </a:solidFill>
         <a:effectLst/>
       </p:bgPr>
@@ -3582,20 +3598,77 @@
       <p:grpSpPr/>
       <p:sp>
         <p:nvSpPr>
-          <p:cNvPr id="2" name="Rectangle 1"/>
+          <p:cNvPr id="2" name="텍스트"/>
+          <p:cNvSpPr txBox="1"/>
+          <p:nvPr/>
+        </p:nvSpPr>
+        <p:spPr>
+          <a:xfrm>
+            <a:off x="252000" y="324000"/>
+            <a:ext cx="2520000" cy="792000"/>
+          </a:xfrm>
+          <a:prstGeom prst="rect">
+            <a:avLst/>
+          </a:prstGeom>
+          <a:noFill/>
+        </p:spPr>
+        <p:txBody>
+          <a:bodyPr wrap="square" lIns="0" rIns="0" tIns="0" bIns="0" anchor="t">
+            <a:spAutoFit/>
+          </a:bodyPr>
+          <a:lstStyle/>
+          <a:p>
+            <a:pPr algn="l">
+              <a:lnSpc>
+                <a:spcPts val="1884"/>
+              </a:lnSpc>
+            </a:pPr>
+            <a:r>
+              <a:rPr sz="1300" b="1">
+                <a:solidFill>
+                  <a:srgbClr val="12151C"/>
+                </a:solidFill>
+                <a:latin typeface="맑은 고딕"/>
+                <a:ea typeface="맑은 고딕"/>
+              </a:rPr>
+              <a:t>필요한 곳에 가장</a:t>
+            </a:r>
+          </a:p>
+          <a:p>
+            <a:pPr algn="l">
+              <a:lnSpc>
+                <a:spcPts val="1884"/>
+              </a:lnSpc>
+            </a:pPr>
+            <a:r>
+              <a:rPr sz="1300" b="1">
+                <a:solidFill>
+                  <a:srgbClr val="12151C"/>
+                </a:solidFill>
+                <a:latin typeface="맑은 고딕"/>
+                <a:ea typeface="맑은 고딕"/>
+              </a:rPr>
+              <a:t>먼저 닿겠습니다</a:t>
+            </a:r>
+          </a:p>
+        </p:txBody>
+      </p:sp>
+      <p:sp>
+        <p:nvSpPr>
+          <p:cNvPr id="3" name="Rectangle 2"/>
           <p:cNvSpPr/>
           <p:nvPr/>
         </p:nvSpPr>
         <p:spPr>
           <a:xfrm>
-            <a:off x="0" y="0"/>
-            <a:ext cx="64800" cy="1800000"/>
+            <a:off x="0" y="1476000"/>
+            <a:ext cx="3240000" cy="324000"/>
           </a:xfrm>
           <a:prstGeom prst="rect">
             <a:avLst/>
           </a:prstGeom>
           <a:solidFill>
-            <a:srgbClr val="3B9158"/>
+            <a:srgbClr val="3D5AFE"/>
           </a:solidFill>
           <a:ln>
             <a:noFill/>
@@ -3611,14 +3684,14 @@
       </p:sp>
       <p:sp>
         <p:nvSpPr>
-          <p:cNvPr id="3" name="텍스트"/>
+          <p:cNvPr id="4" name="텍스트"/>
           <p:cNvSpPr txBox="1"/>
           <p:nvPr/>
         </p:nvSpPr>
         <p:spPr>
           <a:xfrm>
-            <a:off x="252000" y="432000"/>
-            <a:ext cx="2016000" cy="252000"/>
+            <a:off x="252000" y="1569600"/>
+            <a:ext cx="1872000" cy="142876"/>
           </a:xfrm>
           <a:prstGeom prst="rect">
             <a:avLst/>
@@ -3633,13 +3706,13 @@
           <a:p>
             <a:pPr algn="l">
               <a:lnSpc>
-                <a:spcPts val="2465"/>
+                <a:spcPts val="1087"/>
               </a:lnSpc>
             </a:pPr>
             <a:r>
-              <a:rPr sz="1700" b="1">
+              <a:rPr sz="750" b="1" spc="200">
                 <a:solidFill>
-                  <a:srgbClr val="431920"/>
+                  <a:srgbClr val="FFFFFF"/>
                 </a:solidFill>
                 <a:latin typeface="맑은 고딕"/>
                 <a:ea typeface="맑은 고딕"/>
@@ -3651,130 +3724,20 @@
       </p:sp>
       <p:sp>
         <p:nvSpPr>
-          <p:cNvPr id="4" name="텍스트"/>
-          <p:cNvSpPr txBox="1"/>
-          <p:nvPr/>
-        </p:nvSpPr>
-        <p:spPr>
-          <a:xfrm>
-            <a:off x="252000" y="878400"/>
-            <a:ext cx="2016000" cy="540000"/>
-          </a:xfrm>
-          <a:prstGeom prst="rect">
-            <a:avLst/>
-          </a:prstGeom>
-          <a:noFill/>
-        </p:spPr>
-        <p:txBody>
-          <a:bodyPr wrap="square" lIns="0" rIns="0" tIns="0" bIns="0" anchor="t">
-            <a:spAutoFit/>
-          </a:bodyPr>
-          <a:lstStyle/>
-          <a:p>
-            <a:pPr algn="l">
-              <a:lnSpc>
-                <a:spcPts val="1232"/>
-              </a:lnSpc>
-            </a:pPr>
-            <a:r>
-              <a:rPr sz="850" b="0">
-                <a:solidFill>
-                  <a:srgbClr val="83676A"/>
-                </a:solidFill>
-                <a:latin typeface="맑은 고딕"/>
-                <a:ea typeface="맑은 고딕"/>
-              </a:rPr>
-              <a:t>필요한 곳에 가장 먼저 닿겠습니다</a:t>
-            </a:r>
-          </a:p>
-        </p:txBody>
-      </p:sp>
-      <p:sp>
-        <p:nvSpPr>
-          <p:cNvPr id="5" name="Rectangle 4"/>
+          <p:cNvPr id="5" name="Oval 4"/>
           <p:cNvSpPr/>
           <p:nvPr/>
         </p:nvSpPr>
         <p:spPr>
           <a:xfrm>
-            <a:off x="2520000" y="1080000"/>
-            <a:ext cx="504000" cy="504000"/>
-          </a:xfrm>
-          <a:prstGeom prst="rect">
-            <a:avLst/>
-          </a:prstGeom>
-          <a:noFill/>
-          <a:ln w="9000">
-            <a:solidFill>
-              <a:srgbClr val="3B9158"/>
-            </a:solidFill>
-            <a:prstDash val="dash"/>
-          </a:ln>
-        </p:spPr>
-        <p:txBody>
-          <a:bodyPr rtlCol="0" anchor="ctr"/>
-          <a:lstStyle/>
-          <a:p>
-            <a:pPr algn="ctr"/>
-          </a:p>
-        </p:txBody>
-      </p:sp>
-      <p:sp>
-        <p:nvSpPr>
-          <p:cNvPr id="6" name="텍스트"/>
-          <p:cNvSpPr txBox="1"/>
-          <p:nvPr/>
-        </p:nvSpPr>
-        <p:spPr>
-          <a:xfrm>
-            <a:off x="2520000" y="1080000"/>
-            <a:ext cx="504000" cy="504000"/>
-          </a:xfrm>
-          <a:prstGeom prst="rect">
-            <a:avLst/>
-          </a:prstGeom>
-          <a:noFill/>
-        </p:spPr>
-        <p:txBody>
-          <a:bodyPr wrap="square" lIns="0" rIns="0" tIns="0" bIns="0" anchor="ctr">
-            <a:spAutoFit/>
-          </a:bodyPr>
-          <a:lstStyle/>
-          <a:p>
-            <a:pPr algn="ctr">
-              <a:lnSpc>
-                <a:spcPts val="1305"/>
-              </a:lnSpc>
-            </a:pPr>
-            <a:r>
-              <a:rPr sz="900" b="1">
-                <a:solidFill>
-                  <a:srgbClr val="83676A"/>
-                </a:solidFill>
-                <a:latin typeface="맑은 고딕"/>
-                <a:ea typeface="맑은 고딕"/>
-              </a:rPr>
-              <a:t>QR</a:t>
-            </a:r>
-          </a:p>
-        </p:txBody>
-      </p:sp>
-      <p:sp>
-        <p:nvSpPr>
-          <p:cNvPr id="7" name="Rectangle 6"/>
-          <p:cNvSpPr/>
-          <p:nvPr/>
-        </p:nvSpPr>
-        <p:spPr>
-          <a:xfrm>
-            <a:off x="252000" y="763200"/>
-            <a:ext cx="201600" cy="14400"/>
-          </a:xfrm>
-          <a:prstGeom prst="rect">
+            <a:off x="2714400" y="1616400"/>
+            <a:ext cx="43200" cy="43200"/>
+          </a:xfrm>
+          <a:prstGeom prst="ellipse">
             <a:avLst/>
           </a:prstGeom>
           <a:solidFill>
-            <a:srgbClr val="3B9158"/>
+            <a:srgbClr val="FFFFFF"/>
           </a:solidFill>
           <a:ln>
             <a:noFill/>
@@ -3790,59 +3753,53 @@
       </p:sp>
       <p:sp>
         <p:nvSpPr>
-          <p:cNvPr id="8" name="Freeform 7"/>
+          <p:cNvPr id="6" name="Oval 5"/>
           <p:cNvSpPr/>
           <p:nvPr/>
         </p:nvSpPr>
         <p:spPr>
           <a:xfrm>
-            <a:off x="2630255" y="282960"/>
-            <a:ext cx="283490" cy="269616"/>
-          </a:xfrm>
-          <a:custGeom>
+            <a:off x="2822400" y="1616400"/>
+            <a:ext cx="43200" cy="43200"/>
+          </a:xfrm>
+          <a:prstGeom prst="ellipse">
             <a:avLst/>
-            <a:gdLst/>
-            <a:ahLst/>
-            <a:cxnLst/>
-            <a:rect l="l" t="t" r="r" b="b"/>
-            <a:pathLst>
-              <a:path w="283490" h="269616">
-                <a:moveTo>
-                  <a:pt x="141745" y="0"/>
-                </a:moveTo>
-                <a:lnTo>
-                  <a:pt x="177929" y="99237"/>
-                </a:lnTo>
-                <a:lnTo>
-                  <a:pt x="283490" y="102984"/>
-                </a:lnTo>
-                <a:lnTo>
-                  <a:pt x="200292" y="168063"/>
-                </a:lnTo>
-                <a:lnTo>
-                  <a:pt x="229349" y="269616"/>
-                </a:lnTo>
-                <a:lnTo>
-                  <a:pt x="141745" y="210600"/>
-                </a:lnTo>
-                <a:lnTo>
-                  <a:pt x="54141" y="269616"/>
-                </a:lnTo>
-                <a:lnTo>
-                  <a:pt x="83198" y="168063"/>
-                </a:lnTo>
-                <a:lnTo>
-                  <a:pt x="0" y="102984"/>
-                </a:lnTo>
-                <a:lnTo>
-                  <a:pt x="105561" y="99237"/>
-                </a:lnTo>
-                <a:close/>
-              </a:path>
-            </a:pathLst>
-          </a:custGeom>
+          </a:prstGeom>
           <a:solidFill>
-            <a:srgbClr val="3B9158"/>
+            <a:srgbClr val="FFFFFF">
+              <a:alpha val="50000"/>
+            </a:srgbClr>
+          </a:solidFill>
+          <a:ln>
+            <a:noFill/>
+          </a:ln>
+        </p:spPr>
+        <p:txBody>
+          <a:bodyPr rtlCol="0" anchor="ctr"/>
+          <a:lstStyle/>
+          <a:p>
+            <a:pPr algn="ctr"/>
+          </a:p>
+        </p:txBody>
+      </p:sp>
+      <p:sp>
+        <p:nvSpPr>
+          <p:cNvPr id="7" name="Oval 6"/>
+          <p:cNvSpPr/>
+          <p:nvPr/>
+        </p:nvSpPr>
+        <p:spPr>
+          <a:xfrm>
+            <a:off x="2930400" y="1616400"/>
+            <a:ext cx="43200" cy="43200"/>
+          </a:xfrm>
+          <a:prstGeom prst="ellipse">
+            <a:avLst/>
+          </a:prstGeom>
+          <a:solidFill>
+            <a:srgbClr val="FFFFFF">
+              <a:alpha val="50000"/>
+            </a:srgbClr>
           </a:solidFill>
           <a:ln>
             <a:noFill/>

--- a/public/fun/cards/public/public-08.pptx
+++ b/public/fun/cards/public/public-08.pptx
@@ -3105,8 +3105,8 @@
         </p:nvSpPr>
         <p:spPr>
           <a:xfrm>
-            <a:off x="252000" y="144000"/>
-            <a:ext cx="201600" cy="21600"/>
+            <a:off x="0" y="0"/>
+            <a:ext cx="3240000" cy="36000"/>
           </a:xfrm>
           <a:prstGeom prst="rect">
             <a:avLst/>
@@ -3134,8 +3134,8 @@
         </p:nvSpPr>
         <p:spPr>
           <a:xfrm>
-            <a:off x="252000" y="273600"/>
-            <a:ext cx="2160000" cy="360000"/>
+            <a:off x="252000" y="223200"/>
+            <a:ext cx="1296000" cy="237600"/>
           </a:xfrm>
           <a:prstGeom prst="rect">
             <a:avLst/>
@@ -3150,11 +3150,11 @@
           <a:p>
             <a:pPr algn="l">
               <a:lnSpc>
-                <a:spcPts val="3190"/>
+                <a:spcPts val="1957"/>
               </a:lnSpc>
             </a:pPr>
             <a:r>
-              <a:rPr sz="2200" b="1">
+              <a:rPr sz="1350" b="1" spc="120">
                 <a:solidFill>
                   <a:srgbClr val="FFFFFF"/>
                 </a:solidFill>
@@ -3174,8 +3174,8 @@
         </p:nvSpPr>
         <p:spPr>
           <a:xfrm>
-            <a:off x="252000" y="676800"/>
-            <a:ext cx="2160000" cy="171451"/>
+            <a:off x="252000" y="475200"/>
+            <a:ext cx="1296000" cy="133351"/>
           </a:xfrm>
           <a:prstGeom prst="rect">
             <a:avLst/>
@@ -3190,11 +3190,11 @@
           <a:p>
             <a:pPr algn="l">
               <a:lnSpc>
-                <a:spcPts val="1305"/>
+                <a:spcPts val="1015"/>
               </a:lnSpc>
             </a:pPr>
             <a:r>
-              <a:rPr sz="900" b="0">
+              <a:rPr sz="700" b="0">
                 <a:solidFill>
                   <a:srgbClr val="D4DBFF"/>
                 </a:solidFill>
@@ -3214,7 +3214,7 @@
         </p:nvSpPr>
         <p:spPr>
           <a:xfrm>
-            <a:off x="1548000" y="230400"/>
+            <a:off x="1548000" y="259200"/>
             <a:ext cx="1440000" cy="123826"/>
           </a:xfrm>
           <a:prstGeom prst="rect">
@@ -3234,7 +3234,7 @@
               </a:lnSpc>
             </a:pPr>
             <a:r>
-              <a:rPr sz="650" b="1" spc="200">
+              <a:rPr sz="650" b="1" spc="220">
                 <a:solidFill>
                   <a:srgbClr val="D4DBFF"/>
                 </a:solidFill>
@@ -3254,13 +3254,13 @@
         </p:nvCxnSpPr>
         <p:spPr>
           <a:xfrm>
-            <a:off x="252000" y="1051200"/>
+            <a:off x="252000" y="907200"/>
             <a:ext cx="2736000" cy="0"/>
           </a:xfrm>
           <a:prstGeom prst="line">
             <a:avLst/>
           </a:prstGeom>
-          <a:ln w="5760">
+          <a:ln w="3600">
             <a:solidFill>
               <a:srgbClr val="8B9CFE"/>
             </a:solidFill>
@@ -3275,8 +3275,8 @@
         </p:nvSpPr>
         <p:spPr>
           <a:xfrm>
-            <a:off x="252000" y="1123200"/>
-            <a:ext cx="576000" cy="99061"/>
+            <a:off x="252000" y="986400"/>
+            <a:ext cx="576000" cy="91441"/>
           </a:xfrm>
           <a:prstGeom prst="rect">
             <a:avLst/>
@@ -3291,11 +3291,11 @@
           <a:p>
             <a:pPr algn="l">
               <a:lnSpc>
-                <a:spcPts val="754"/>
+                <a:spcPts val="696"/>
               </a:lnSpc>
             </a:pPr>
             <a:r>
-              <a:rPr sz="520" b="1" spc="150">
+              <a:rPr sz="480" b="1" spc="160">
                 <a:solidFill>
                   <a:srgbClr val="D4DBFF"/>
                 </a:solidFill>
@@ -3315,8 +3315,8 @@
         </p:nvSpPr>
         <p:spPr>
           <a:xfrm>
-            <a:off x="900000" y="1101600"/>
-            <a:ext cx="2088000" cy="142876"/>
+            <a:off x="936000" y="968400"/>
+            <a:ext cx="2052000" cy="133351"/>
           </a:xfrm>
           <a:prstGeom prst="rect">
             <a:avLst/>
@@ -3331,11 +3331,11 @@
           <a:p>
             <a:pPr algn="l">
               <a:lnSpc>
-                <a:spcPts val="1087"/>
+                <a:spcPts val="1015"/>
               </a:lnSpc>
             </a:pPr>
             <a:r>
-              <a:rPr sz="750" b="0">
+              <a:rPr sz="700" b="0">
                 <a:solidFill>
                   <a:srgbClr val="FFFFFF"/>
                 </a:solidFill>
@@ -3355,13 +3355,13 @@
         </p:nvCxnSpPr>
         <p:spPr>
           <a:xfrm>
-            <a:off x="252000" y="1274400"/>
+            <a:off x="252000" y="1137600"/>
             <a:ext cx="2736000" cy="0"/>
           </a:xfrm>
           <a:prstGeom prst="line">
             <a:avLst/>
           </a:prstGeom>
-          <a:ln w="5760">
+          <a:ln w="3600">
             <a:solidFill>
               <a:srgbClr val="8B9CFE"/>
             </a:solidFill>
@@ -3376,8 +3376,8 @@
         </p:nvSpPr>
         <p:spPr>
           <a:xfrm>
-            <a:off x="252000" y="1346400"/>
-            <a:ext cx="576000" cy="99061"/>
+            <a:off x="252000" y="1216800"/>
+            <a:ext cx="576000" cy="91441"/>
           </a:xfrm>
           <a:prstGeom prst="rect">
             <a:avLst/>
@@ -3392,11 +3392,11 @@
           <a:p>
             <a:pPr algn="l">
               <a:lnSpc>
-                <a:spcPts val="754"/>
+                <a:spcPts val="696"/>
               </a:lnSpc>
             </a:pPr>
             <a:r>
-              <a:rPr sz="520" b="1" spc="150">
+              <a:rPr sz="480" b="1" spc="160">
                 <a:solidFill>
                   <a:srgbClr val="D4DBFF"/>
                 </a:solidFill>
@@ -3416,8 +3416,8 @@
         </p:nvSpPr>
         <p:spPr>
           <a:xfrm>
-            <a:off x="900000" y="1324800"/>
-            <a:ext cx="2088000" cy="142876"/>
+            <a:off x="936000" y="1198800"/>
+            <a:ext cx="2052000" cy="133351"/>
           </a:xfrm>
           <a:prstGeom prst="rect">
             <a:avLst/>
@@ -3432,11 +3432,11 @@
           <a:p>
             <a:pPr algn="l">
               <a:lnSpc>
-                <a:spcPts val="1087"/>
+                <a:spcPts val="1015"/>
               </a:lnSpc>
             </a:pPr>
             <a:r>
-              <a:rPr sz="750" b="0">
+              <a:rPr sz="700" b="0">
                 <a:solidFill>
                   <a:srgbClr val="FFFFFF"/>
                 </a:solidFill>
@@ -3456,13 +3456,13 @@
         </p:nvCxnSpPr>
         <p:spPr>
           <a:xfrm>
-            <a:off x="252000" y="1497600"/>
+            <a:off x="252000" y="1368000"/>
             <a:ext cx="2736000" cy="0"/>
           </a:xfrm>
           <a:prstGeom prst="line">
             <a:avLst/>
           </a:prstGeom>
-          <a:ln w="5760">
+          <a:ln w="3600">
             <a:solidFill>
               <a:srgbClr val="8B9CFE"/>
             </a:solidFill>
@@ -3477,8 +3477,8 @@
         </p:nvSpPr>
         <p:spPr>
           <a:xfrm>
-            <a:off x="252000" y="1569600"/>
-            <a:ext cx="576000" cy="99061"/>
+            <a:off x="252000" y="1447200"/>
+            <a:ext cx="576000" cy="91441"/>
           </a:xfrm>
           <a:prstGeom prst="rect">
             <a:avLst/>
@@ -3493,11 +3493,11 @@
           <a:p>
             <a:pPr algn="l">
               <a:lnSpc>
-                <a:spcPts val="754"/>
+                <a:spcPts val="696"/>
               </a:lnSpc>
             </a:pPr>
             <a:r>
-              <a:rPr sz="520" b="1" spc="150">
+              <a:rPr sz="480" b="1" spc="160">
                 <a:solidFill>
                   <a:srgbClr val="D4DBFF"/>
                 </a:solidFill>
@@ -3517,8 +3517,8 @@
         </p:nvSpPr>
         <p:spPr>
           <a:xfrm>
-            <a:off x="900000" y="1548000"/>
-            <a:ext cx="2088000" cy="142876"/>
+            <a:off x="936000" y="1429200"/>
+            <a:ext cx="2052000" cy="133351"/>
           </a:xfrm>
           <a:prstGeom prst="rect">
             <a:avLst/>
@@ -3533,11 +3533,11 @@
           <a:p>
             <a:pPr algn="l">
               <a:lnSpc>
-                <a:spcPts val="1087"/>
+                <a:spcPts val="1015"/>
               </a:lnSpc>
             </a:pPr>
             <a:r>
-              <a:rPr sz="750" b="0">
+              <a:rPr sz="700" b="0">
                 <a:solidFill>
                   <a:srgbClr val="FFFFFF"/>
                 </a:solidFill>
@@ -3557,13 +3557,13 @@
         </p:nvCxnSpPr>
         <p:spPr>
           <a:xfrm>
-            <a:off x="252000" y="1720800"/>
+            <a:off x="252000" y="1598400"/>
             <a:ext cx="2736000" cy="0"/>
           </a:xfrm>
           <a:prstGeom prst="line">
             <a:avLst/>
           </a:prstGeom>
-          <a:ln w="5760">
+          <a:ln w="3600">
             <a:solidFill>
               <a:srgbClr val="8B9CFE"/>
             </a:solidFill>
@@ -3604,8 +3604,8 @@
         </p:nvSpPr>
         <p:spPr>
           <a:xfrm>
-            <a:off x="252000" y="324000"/>
-            <a:ext cx="2520000" cy="792000"/>
+            <a:off x="252000" y="252000"/>
+            <a:ext cx="1080000" cy="99061"/>
           </a:xfrm>
           <a:prstGeom prst="rect">
             <a:avLst/>
@@ -3620,35 +3620,18 @@
           <a:p>
             <a:pPr algn="l">
               <a:lnSpc>
-                <a:spcPts val="1884"/>
+                <a:spcPts val="754"/>
               </a:lnSpc>
             </a:pPr>
             <a:r>
-              <a:rPr sz="1300" b="1">
+              <a:rPr sz="520" b="1" spc="240">
                 <a:solidFill>
-                  <a:srgbClr val="12151C"/>
+                  <a:srgbClr val="6B7280"/>
                 </a:solidFill>
                 <a:latin typeface="맑은 고딕"/>
                 <a:ea typeface="맑은 고딕"/>
               </a:rPr>
-              <a:t>필요한 곳에 가장</a:t>
-            </a:r>
-          </a:p>
-          <a:p>
-            <a:pPr algn="l">
-              <a:lnSpc>
-                <a:spcPts val="1884"/>
-              </a:lnSpc>
-            </a:pPr>
-            <a:r>
-              <a:rPr sz="1300" b="1">
-                <a:solidFill>
-                  <a:srgbClr val="12151C"/>
-                </a:solidFill>
-                <a:latin typeface="맑은 고딕"/>
-                <a:ea typeface="맑은 고딕"/>
-              </a:rPr>
-              <a:t>먼저 닿겠습니다</a:t>
+              <a:t>담당 업무</a:t>
             </a:r>
           </a:p>
         </p:txBody>
@@ -3661,8 +3644,8 @@
         </p:nvSpPr>
         <p:spPr>
           <a:xfrm>
-            <a:off x="0" y="1476000"/>
-            <a:ext cx="3240000" cy="324000"/>
+            <a:off x="252000" y="352800"/>
+            <a:ext cx="108000" cy="14400"/>
           </a:xfrm>
           <a:prstGeom prst="rect">
             <a:avLst/>
@@ -3682,16 +3665,37 @@
           </a:p>
         </p:txBody>
       </p:sp>
-      <p:sp>
-        <p:nvSpPr>
-          <p:cNvPr id="4" name="텍스트"/>
+      <p:cxnSp>
+        <p:nvCxnSpPr>
+          <p:cNvPr id="4" name="Connector 3"/>
+          <p:cNvCxnSpPr/>
+          <p:nvPr/>
+        </p:nvCxnSpPr>
+        <p:spPr>
+          <a:xfrm>
+            <a:off x="252000" y="468000"/>
+            <a:ext cx="1512000" cy="0"/>
+          </a:xfrm>
+          <a:prstGeom prst="line">
+            <a:avLst/>
+          </a:prstGeom>
+          <a:ln w="3600">
+            <a:solidFill>
+              <a:srgbClr val="E3E5E9"/>
+            </a:solidFill>
+          </a:ln>
+        </p:spPr>
+      </p:cxnSp>
+      <p:sp>
+        <p:nvSpPr>
+          <p:cNvPr id="5" name="텍스트"/>
           <p:cNvSpPr txBox="1"/>
           <p:nvPr/>
         </p:nvSpPr>
         <p:spPr>
           <a:xfrm>
-            <a:off x="252000" y="1569600"/>
-            <a:ext cx="1872000" cy="142876"/>
+            <a:off x="252000" y="511200"/>
+            <a:ext cx="1260000" cy="133351"/>
           </a:xfrm>
           <a:prstGeom prst="rect">
             <a:avLst/>
@@ -3706,41 +3710,185 @@
           <a:p>
             <a:pPr algn="l">
               <a:lnSpc>
-                <a:spcPts val="1087"/>
+                <a:spcPts val="1015"/>
               </a:lnSpc>
             </a:pPr>
             <a:r>
-              <a:rPr sz="750" b="1" spc="200">
+              <a:rPr sz="700" b="0">
                 <a:solidFill>
-                  <a:srgbClr val="FFFFFF"/>
+                  <a:srgbClr val="12151C"/>
                 </a:solidFill>
                 <a:latin typeface="맑은 고딕"/>
                 <a:ea typeface="맑은 고딕"/>
               </a:rPr>
-              <a:t>기관명 · 부서명</a:t>
-            </a:r>
-          </a:p>
-        </p:txBody>
-      </p:sp>
-      <p:sp>
-        <p:nvSpPr>
-          <p:cNvPr id="5" name="Oval 4"/>
+              <a:t>복지 안내</a:t>
+            </a:r>
+          </a:p>
+        </p:txBody>
+      </p:sp>
+      <p:cxnSp>
+        <p:nvCxnSpPr>
+          <p:cNvPr id="6" name="Connector 5"/>
+          <p:cNvCxnSpPr/>
+          <p:nvPr/>
+        </p:nvCxnSpPr>
+        <p:spPr>
+          <a:xfrm>
+            <a:off x="252000" y="655200"/>
+            <a:ext cx="1512000" cy="0"/>
+          </a:xfrm>
+          <a:prstGeom prst="line">
+            <a:avLst/>
+          </a:prstGeom>
+          <a:ln w="3600">
+            <a:solidFill>
+              <a:srgbClr val="E3E5E9"/>
+            </a:solidFill>
+          </a:ln>
+        </p:spPr>
+      </p:cxnSp>
+      <p:sp>
+        <p:nvSpPr>
+          <p:cNvPr id="7" name="텍스트"/>
+          <p:cNvSpPr txBox="1"/>
+          <p:nvPr/>
+        </p:nvSpPr>
+        <p:spPr>
+          <a:xfrm>
+            <a:off x="252000" y="698400"/>
+            <a:ext cx="1260000" cy="133351"/>
+          </a:xfrm>
+          <a:prstGeom prst="rect">
+            <a:avLst/>
+          </a:prstGeom>
+          <a:noFill/>
+        </p:spPr>
+        <p:txBody>
+          <a:bodyPr wrap="square" lIns="0" rIns="0" tIns="0" bIns="0" anchor="t">
+            <a:spAutoFit/>
+          </a:bodyPr>
+          <a:lstStyle/>
+          <a:p>
+            <a:pPr algn="l">
+              <a:lnSpc>
+                <a:spcPts val="1015"/>
+              </a:lnSpc>
+            </a:pPr>
+            <a:r>
+              <a:rPr sz="700" b="0">
+                <a:solidFill>
+                  <a:srgbClr val="12151C"/>
+                </a:solidFill>
+                <a:latin typeface="맑은 고딕"/>
+                <a:ea typeface="맑은 고딕"/>
+              </a:rPr>
+              <a:t>지역 사업</a:t>
+            </a:r>
+          </a:p>
+        </p:txBody>
+      </p:sp>
+      <p:cxnSp>
+        <p:nvCxnSpPr>
+          <p:cNvPr id="8" name="Connector 7"/>
+          <p:cNvCxnSpPr/>
+          <p:nvPr/>
+        </p:nvCxnSpPr>
+        <p:spPr>
+          <a:xfrm>
+            <a:off x="252000" y="842400"/>
+            <a:ext cx="1512000" cy="0"/>
+          </a:xfrm>
+          <a:prstGeom prst="line">
+            <a:avLst/>
+          </a:prstGeom>
+          <a:ln w="3600">
+            <a:solidFill>
+              <a:srgbClr val="E3E5E9"/>
+            </a:solidFill>
+          </a:ln>
+        </p:spPr>
+      </p:cxnSp>
+      <p:sp>
+        <p:nvSpPr>
+          <p:cNvPr id="9" name="텍스트"/>
+          <p:cNvSpPr txBox="1"/>
+          <p:nvPr/>
+        </p:nvSpPr>
+        <p:spPr>
+          <a:xfrm>
+            <a:off x="252000" y="885600"/>
+            <a:ext cx="1260000" cy="133351"/>
+          </a:xfrm>
+          <a:prstGeom prst="rect">
+            <a:avLst/>
+          </a:prstGeom>
+          <a:noFill/>
+        </p:spPr>
+        <p:txBody>
+          <a:bodyPr wrap="square" lIns="0" rIns="0" tIns="0" bIns="0" anchor="t">
+            <a:spAutoFit/>
+          </a:bodyPr>
+          <a:lstStyle/>
+          <a:p>
+            <a:pPr algn="l">
+              <a:lnSpc>
+                <a:spcPts val="1015"/>
+              </a:lnSpc>
+            </a:pPr>
+            <a:r>
+              <a:rPr sz="700" b="0">
+                <a:solidFill>
+                  <a:srgbClr val="12151C"/>
+                </a:solidFill>
+                <a:latin typeface="맑은 고딕"/>
+                <a:ea typeface="맑은 고딕"/>
+              </a:rPr>
+              <a:t>허가 · 신고</a:t>
+            </a:r>
+          </a:p>
+        </p:txBody>
+      </p:sp>
+      <p:cxnSp>
+        <p:nvCxnSpPr>
+          <p:cNvPr id="10" name="Connector 9"/>
+          <p:cNvCxnSpPr/>
+          <p:nvPr/>
+        </p:nvCxnSpPr>
+        <p:spPr>
+          <a:xfrm>
+            <a:off x="252000" y="1029600"/>
+            <a:ext cx="1512000" cy="0"/>
+          </a:xfrm>
+          <a:prstGeom prst="line">
+            <a:avLst/>
+          </a:prstGeom>
+          <a:ln w="3600">
+            <a:solidFill>
+              <a:srgbClr val="E3E5E9"/>
+            </a:solidFill>
+          </a:ln>
+        </p:spPr>
+      </p:cxnSp>
+      <p:sp>
+        <p:nvSpPr>
+          <p:cNvPr id="11" name="Rectangle 10"/>
           <p:cNvSpPr/>
           <p:nvPr/>
         </p:nvSpPr>
         <p:spPr>
           <a:xfrm>
-            <a:off x="2714400" y="1616400"/>
-            <a:ext cx="43200" cy="43200"/>
-          </a:xfrm>
-          <a:prstGeom prst="ellipse">
+            <a:off x="2196000" y="396000"/>
+            <a:ext cx="720000" cy="720000"/>
+          </a:xfrm>
+          <a:prstGeom prst="rect">
             <a:avLst/>
           </a:prstGeom>
-          <a:solidFill>
-            <a:srgbClr val="FFFFFF"/>
-          </a:solidFill>
-          <a:ln>
-            <a:noFill/>
+          <a:noFill/>
+          <a:ln w="4320">
+            <a:solidFill>
+              <a:srgbClr val="6B7280"/>
+            </a:solidFill>
+            <a:prstDash val="dash"/>
           </a:ln>
         </p:spPr>
         <p:txBody>
@@ -3753,63 +3901,121 @@
       </p:sp>
       <p:sp>
         <p:nvSpPr>
-          <p:cNvPr id="6" name="Oval 5"/>
-          <p:cNvSpPr/>
+          <p:cNvPr id="12" name="텍스트"/>
+          <p:cNvSpPr txBox="1"/>
           <p:nvPr/>
         </p:nvSpPr>
         <p:spPr>
           <a:xfrm>
-            <a:off x="2822400" y="1616400"/>
-            <a:ext cx="43200" cy="43200"/>
-          </a:xfrm>
-          <a:prstGeom prst="ellipse">
+            <a:off x="2196000" y="396000"/>
+            <a:ext cx="720000" cy="720000"/>
+          </a:xfrm>
+          <a:prstGeom prst="rect">
             <a:avLst/>
           </a:prstGeom>
-          <a:solidFill>
-            <a:srgbClr val="FFFFFF">
-              <a:alpha val="50000"/>
-            </a:srgbClr>
-          </a:solidFill>
-          <a:ln>
-            <a:noFill/>
-          </a:ln>
-        </p:spPr>
-        <p:txBody>
-          <a:bodyPr rtlCol="0" anchor="ctr"/>
-          <a:lstStyle/>
-          <a:p>
-            <a:pPr algn="ctr"/>
-          </a:p>
-        </p:txBody>
-      </p:sp>
-      <p:sp>
-        <p:nvSpPr>
-          <p:cNvPr id="7" name="Oval 6"/>
-          <p:cNvSpPr/>
+          <a:noFill/>
+        </p:spPr>
+        <p:txBody>
+          <a:bodyPr wrap="square" lIns="0" rIns="0" tIns="0" bIns="0" anchor="ctr">
+            <a:spAutoFit/>
+          </a:bodyPr>
+          <a:lstStyle/>
+          <a:p>
+            <a:pPr algn="ctr">
+              <a:lnSpc>
+                <a:spcPts val="1305"/>
+              </a:lnSpc>
+            </a:pPr>
+            <a:r>
+              <a:rPr sz="900" b="1">
+                <a:solidFill>
+                  <a:srgbClr val="6B7280"/>
+                </a:solidFill>
+                <a:latin typeface="맑은 고딕"/>
+                <a:ea typeface="맑은 고딕"/>
+              </a:rPr>
+              <a:t>QR</a:t>
+            </a:r>
+          </a:p>
+        </p:txBody>
+      </p:sp>
+      <p:sp>
+        <p:nvSpPr>
+          <p:cNvPr id="13" name="텍스트"/>
+          <p:cNvSpPr txBox="1"/>
           <p:nvPr/>
         </p:nvSpPr>
         <p:spPr>
           <a:xfrm>
-            <a:off x="2930400" y="1616400"/>
-            <a:ext cx="43200" cy="43200"/>
-          </a:xfrm>
-          <a:prstGeom prst="ellipse">
+            <a:off x="2196000" y="1209600"/>
+            <a:ext cx="720000" cy="118111"/>
+          </a:xfrm>
+          <a:prstGeom prst="rect">
             <a:avLst/>
           </a:prstGeom>
-          <a:solidFill>
-            <a:srgbClr val="FFFFFF">
-              <a:alpha val="50000"/>
-            </a:srgbClr>
-          </a:solidFill>
-          <a:ln>
-            <a:noFill/>
-          </a:ln>
-        </p:spPr>
-        <p:txBody>
-          <a:bodyPr rtlCol="0" anchor="ctr"/>
-          <a:lstStyle/>
-          <a:p>
-            <a:pPr algn="ctr"/>
+          <a:noFill/>
+        </p:spPr>
+        <p:txBody>
+          <a:bodyPr wrap="square" lIns="0" rIns="0" tIns="0" bIns="0" anchor="t">
+            <a:spAutoFit/>
+          </a:bodyPr>
+          <a:lstStyle/>
+          <a:p>
+            <a:pPr algn="ctr">
+              <a:lnSpc>
+                <a:spcPts val="899"/>
+              </a:lnSpc>
+            </a:pPr>
+            <a:r>
+              <a:rPr sz="620" b="0">
+                <a:solidFill>
+                  <a:srgbClr val="12151C"/>
+                </a:solidFill>
+                <a:latin typeface="맑은 고딕"/>
+                <a:ea typeface="맑은 고딕"/>
+              </a:rPr>
+              <a:t>@채널아이디</a:t>
+            </a:r>
+          </a:p>
+        </p:txBody>
+      </p:sp>
+      <p:sp>
+        <p:nvSpPr>
+          <p:cNvPr id="14" name="텍스트"/>
+          <p:cNvSpPr txBox="1"/>
+          <p:nvPr/>
+        </p:nvSpPr>
+        <p:spPr>
+          <a:xfrm>
+            <a:off x="2196000" y="1353600"/>
+            <a:ext cx="720000" cy="118111"/>
+          </a:xfrm>
+          <a:prstGeom prst="rect">
+            <a:avLst/>
+          </a:prstGeom>
+          <a:noFill/>
+        </p:spPr>
+        <p:txBody>
+          <a:bodyPr wrap="square" lIns="0" rIns="0" tIns="0" bIns="0" anchor="t">
+            <a:spAutoFit/>
+          </a:bodyPr>
+          <a:lstStyle/>
+          <a:p>
+            <a:pPr algn="ctr">
+              <a:lnSpc>
+                <a:spcPts val="899"/>
+              </a:lnSpc>
+            </a:pPr>
+            <a:r>
+              <a:rPr sz="620" b="0">
+                <a:solidFill>
+                  <a:srgbClr val="6B7280"/>
+                </a:solidFill>
+                <a:latin typeface="맑은 고딕"/>
+                <a:ea typeface="맑은 고딕"/>
+              </a:rPr>
+              <a:t>평일 09:00 – 18:00</a:t>
+            </a:r>
           </a:p>
         </p:txBody>
       </p:sp>
